--- a/slides/week09/testing-enhanced.pptx
+++ b/slides/week09/testing-enhanced.pptx
@@ -5,7 +5,7 @@
     <p:sldMasterId id="2147483648" r:id="rId1"/>
   </p:sldMasterIdLst>
   <p:notesMasterIdLst>
-    <p:notesMasterId r:id="rId21"/>
+    <p:notesMasterId r:id="rId24"/>
   </p:notesMasterIdLst>
   <p:sldIdLst>
     <p:sldId id="256" r:id="rId2"/>
@@ -26,33 +26,40 @@
     <p:sldId id="261" r:id="rId17"/>
     <p:sldId id="262" r:id="rId18"/>
     <p:sldId id="263" r:id="rId19"/>
-    <p:sldId id="287" r:id="rId125"/>
-    <p:sldId id="288" r:id="rId126"/>
-    <p:sldId id="289" r:id="rId127"/>
-    <p:sldId id="264" r:id="rId20"/>
+    <p:sldId id="287" r:id="rId20"/>
+    <p:sldId id="288" r:id="rId21"/>
+    <p:sldId id="289" r:id="rId22"/>
+    <p:sldId id="264" r:id="rId23"/>
   </p:sldIdLst>
   <p:sldSz cx="12192000" cy="6858000"/>
   <p:notesSz cx="6858000" cy="9144000"/>
   <p:embeddedFontLst>
     <p:embeddedFont>
-      <p:font typeface="Raleway" pitchFamily="2" charset="77"/>
-      <p:regular r:id="rId22"/>
-      <p:bold r:id="rId23"/>
-      <p:italic r:id="rId24"/>
-      <p:boldItalic r:id="rId25"/>
-    </p:embeddedFont>
-    <p:embeddedFont>
-      <p:font typeface="Raleway ExtraBold" pitchFamily="2" charset="77"/>
+      <p:font typeface="Consolas" panose="020B0609020204030204" pitchFamily="49" charset="0"/>
+      <p:regular r:id="rId25"/>
       <p:bold r:id="rId26"/>
       <p:italic r:id="rId27"/>
       <p:boldItalic r:id="rId28"/>
     </p:embeddedFont>
     <p:embeddedFont>
-      <p:font typeface="Raleway SemiBold" pitchFamily="2" charset="77"/>
+      <p:font typeface="Raleway" pitchFamily="2" charset="77"/>
       <p:regular r:id="rId29"/>
       <p:bold r:id="rId30"/>
       <p:italic r:id="rId31"/>
       <p:boldItalic r:id="rId32"/>
+    </p:embeddedFont>
+    <p:embeddedFont>
+      <p:font typeface="Raleway ExtraBold" pitchFamily="2" charset="77"/>
+      <p:bold r:id="rId33"/>
+      <p:italic r:id="rId34"/>
+      <p:boldItalic r:id="rId35"/>
+    </p:embeddedFont>
+    <p:embeddedFont>
+      <p:font typeface="Raleway SemiBold" pitchFamily="2" charset="77"/>
+      <p:regular r:id="rId36"/>
+      <p:bold r:id="rId37"/>
+      <p:italic r:id="rId38"/>
+      <p:boldItalic r:id="rId39"/>
     </p:embeddedFont>
   </p:embeddedFontLst>
   <p:defaultTextStyle>
@@ -289,7 +296,7 @@
       <p15:sldGuideLst xmlns:p15="http://schemas.microsoft.com/office/powerpoint/2012/main"/>
     </p:ext>
     <p:ext uri="GoogleSlidesCustomDataVersion2">
-      <go:slidesCustomData xmlns:go="http://customooxmlschemas.google.com/" xmlns:ahyp="http://schemas.microsoft.com/office/drawing/2018/hyperlinkcolor" xmlns:p15="http://schemas.microsoft.com/office/powerpoint/2012/main" xmlns:p14="http://schemas.microsoft.com/office/powerpoint/2010/main" xmlns:com="http://schemas.openxmlformats.org/drawingml/2006/compatibility" xmlns:pvml="urn:schemas-microsoft-com:office:powerpoint" xmlns:v="urn:schemas-microsoft-com:vml" xmlns:o="urn:schemas-microsoft-com:office:office" xmlns:dgm="http://schemas.openxmlformats.org/drawingml/2006/diagram" xmlns:c="http://schemas.openxmlformats.org/drawingml/2006/chart" xmlns:mv="urn:schemas-microsoft-com:mac:vml" xmlns:mc="http://schemas.openxmlformats.org/markup-compatibility/2006" xmlns="" r:id="rId120" roundtripDataSignature="AMtx7mgJIPsVM9PdwC/BelE/w58o2aAl6w=="/>
+      <go:slidesCustomData xmlns="" xmlns:mc="http://schemas.openxmlformats.org/markup-compatibility/2006" xmlns:mv="urn:schemas-microsoft-com:mac:vml" xmlns:c="http://schemas.openxmlformats.org/drawingml/2006/chart" xmlns:dgm="http://schemas.openxmlformats.org/drawingml/2006/diagram" xmlns:o="urn:schemas-microsoft-com:office:office" xmlns:v="urn:schemas-microsoft-com:vml" xmlns:pvml="urn:schemas-microsoft-com:office:powerpoint" xmlns:com="http://schemas.openxmlformats.org/drawingml/2006/compatibility" xmlns:p14="http://schemas.microsoft.com/office/powerpoint/2010/main" xmlns:p15="http://schemas.microsoft.com/office/powerpoint/2012/main" xmlns:ahyp="http://schemas.microsoft.com/office/drawing/2018/hyperlinkcolor" xmlns:go="http://customooxmlschemas.google.com/" r:id="rId120" roundtripDataSignature="AMtx7mgJIPsVM9PdwC/BelE/w58o2aAl6w=="/>
     </p:ext>
   </p:extLst>
 </p:presentation>
@@ -6767,7 +6774,7 @@
           <a:p>
             <a:fld id="{5BCAD085-E8A6-8845-BD4E-CB4CCA059FC4}" type="datetimeFigureOut">
               <a:rPr lang="en-US" smtClean="0"/>
-              <a:t>3/17/26</a:t>
+              <a:t>3/23/26</a:t>
             </a:fld>
             <a:endParaRPr lang="en-US"/>
           </a:p>
@@ -9066,60 +9073,6 @@
           </a:ln>
         </p:spPr>
       </p:pic>
-      <p:pic>
-        <p:nvPicPr>
-          <p:cNvPr id="129" name="Google Shape;129;g389dc543835_0_2"/>
-          <p:cNvPicPr preferRelativeResize="0"/>
-          <p:nvPr/>
-        </p:nvPicPr>
-        <p:blipFill rotWithShape="1">
-          <a:blip r:embed="rId4">
-            <a:alphaModFix/>
-          </a:blip>
-          <a:srcRect/>
-          <a:stretch/>
-        </p:blipFill>
-        <p:spPr>
-          <a:xfrm>
-            <a:off x="4466094" y="4255848"/>
-            <a:ext cx="2076569" cy="2086712"/>
-          </a:xfrm>
-          <a:prstGeom prst="rect">
-            <a:avLst/>
-          </a:prstGeom>
-          <a:noFill/>
-          <a:ln>
-            <a:noFill/>
-          </a:ln>
-        </p:spPr>
-      </p:pic>
-      <p:pic>
-        <p:nvPicPr>
-          <p:cNvPr id="130" name="Google Shape;130;g389dc543835_0_2" descr="Programs | NY I-Corps Hub"/>
-          <p:cNvPicPr preferRelativeResize="0"/>
-          <p:nvPr/>
-        </p:nvPicPr>
-        <p:blipFill rotWithShape="1">
-          <a:blip r:embed="rId5">
-            <a:alphaModFix/>
-          </a:blip>
-          <a:srcRect/>
-          <a:stretch/>
-        </p:blipFill>
-        <p:spPr>
-          <a:xfrm>
-            <a:off x="8527222" y="4587646"/>
-            <a:ext cx="1957443" cy="1423115"/>
-          </a:xfrm>
-          <a:prstGeom prst="rect">
-            <a:avLst/>
-          </a:prstGeom>
-          <a:noFill/>
-          <a:ln>
-            <a:noFill/>
-          </a:ln>
-        </p:spPr>
-      </p:pic>
     </p:spTree>
   </p:cSld>
   <p:clrMapOvr>
@@ -9592,9 +9545,7 @@
             </a:r>
           </a:p>
           <a:p>
-            <a:r>
-              <a:t/>
-            </a:r>
+            <a:endParaRPr b="1"/>
           </a:p>
           <a:p>
             <a:r>
@@ -9617,7 +9568,7 @@
                 <a:latin typeface="Consolas"/>
                 <a:cs typeface="Consolas"/>
               </a:rPr>
-              <a:t xml:space="preserve">  const result = validateCredentials('alice', '123');</a:t>
+              <a:t>  const result = validateCredentials('alice', '123');</a:t>
             </a:r>
           </a:p>
           <a:p>
@@ -9626,7 +9577,7 @@
                 <a:latin typeface="Consolas"/>
                 <a:cs typeface="Consolas"/>
               </a:rPr>
-              <a:t xml:space="preserve">  expect(result.valid).toBe(false);</a:t>
+              <a:t>  expect(result.valid).toBe(false);</a:t>
             </a:r>
           </a:p>
           <a:p>
@@ -9639,9 +9590,10 @@
             </a:r>
           </a:p>
           <a:p>
-            <a:r>
-              <a:t/>
-            </a:r>
+            <a:endParaRPr sz="1400">
+              <a:latin typeface="Consolas"/>
+              <a:cs typeface="Consolas"/>
+            </a:endParaRPr>
           </a:p>
           <a:p>
             <a:pPr lvl="1"/>
@@ -9724,9 +9676,7 @@
             </a:r>
           </a:p>
           <a:p>
-            <a:r>
-              <a:t/>
-            </a:r>
+            <a:endParaRPr b="1"/>
           </a:p>
           <a:p>
             <a:r>
@@ -9749,7 +9699,7 @@
                 <a:latin typeface="Consolas"/>
                 <a:cs typeface="Consolas"/>
               </a:rPr>
-              <a:t xml:space="preserve">  const res = await request(app)</a:t>
+              <a:t>  const res = await request(app)</a:t>
             </a:r>
           </a:p>
           <a:p>
@@ -9758,7 +9708,7 @@
                 <a:latin typeface="Consolas"/>
                 <a:cs typeface="Consolas"/>
               </a:rPr>
-              <a:t xml:space="preserve">    .post('/api/register')</a:t>
+              <a:t>    .post('/api/register')</a:t>
             </a:r>
           </a:p>
           <a:p>
@@ -9767,7 +9717,7 @@
                 <a:latin typeface="Consolas"/>
                 <a:cs typeface="Consolas"/>
               </a:rPr>
-              <a:t xml:space="preserve">    .send({ username: 'alice', password: 'pass123' });</a:t>
+              <a:t>    .send({ username: 'alice', password: 'pass123' });</a:t>
             </a:r>
           </a:p>
           <a:p>
@@ -9776,7 +9726,7 @@
                 <a:latin typeface="Consolas"/>
                 <a:cs typeface="Consolas"/>
               </a:rPr>
-              <a:t xml:space="preserve">  expect(res.status).toBe(201);</a:t>
+              <a:t>  expect(res.status).toBe(201);</a:t>
             </a:r>
           </a:p>
           <a:p>
@@ -9789,9 +9739,10 @@
             </a:r>
           </a:p>
           <a:p>
-            <a:r>
-              <a:t/>
-            </a:r>
+            <a:endParaRPr sz="1400">
+              <a:latin typeface="Consolas"/>
+              <a:cs typeface="Consolas"/>
+            </a:endParaRPr>
           </a:p>
           <a:p>
             <a:pPr lvl="1"/>
@@ -9874,9 +9825,7 @@
             </a:r>
           </a:p>
           <a:p>
-            <a:r>
-              <a:t/>
-            </a:r>
+            <a:endParaRPr b="1"/>
           </a:p>
           <a:p>
             <a:r>
@@ -9899,7 +9848,7 @@
                 <a:latin typeface="Consolas"/>
                 <a:cs typeface="Consolas"/>
               </a:rPr>
-              <a:t xml:space="preserve">  await page.locator('input[type="text"]')</a:t>
+              <a:t>  await page.locator('input[type="text"]')</a:t>
             </a:r>
           </a:p>
           <a:p>
@@ -9908,7 +9857,7 @@
                 <a:latin typeface="Consolas"/>
                 <a:cs typeface="Consolas"/>
               </a:rPr>
-              <a:t xml:space="preserve">    .fill('alice');</a:t>
+              <a:t>    .fill('alice');</a:t>
             </a:r>
           </a:p>
           <a:p>
@@ -9917,7 +9866,7 @@
                 <a:latin typeface="Consolas"/>
                 <a:cs typeface="Consolas"/>
               </a:rPr>
-              <a:t xml:space="preserve">  await page.locator('button').click();</a:t>
+              <a:t>  await page.locator('button').click();</a:t>
             </a:r>
           </a:p>
           <a:p>
@@ -9926,7 +9875,7 @@
                 <a:latin typeface="Consolas"/>
                 <a:cs typeface="Consolas"/>
               </a:rPr>
-              <a:t xml:space="preserve">  await expect(page.locator('.success'))</a:t>
+              <a:t>  await expect(page.locator('.success'))</a:t>
             </a:r>
           </a:p>
           <a:p>
@@ -9935,7 +9884,7 @@
                 <a:latin typeface="Consolas"/>
                 <a:cs typeface="Consolas"/>
               </a:rPr>
-              <a:t xml:space="preserve">    .toBeVisible();</a:t>
+              <a:t>    .toBeVisible();</a:t>
             </a:r>
           </a:p>
           <a:p>
@@ -9948,9 +9897,10 @@
             </a:r>
           </a:p>
           <a:p>
-            <a:r>
-              <a:t/>
-            </a:r>
+            <a:endParaRPr sz="1400">
+              <a:latin typeface="Consolas"/>
+              <a:cs typeface="Consolas"/>
+            </a:endParaRPr>
           </a:p>
           <a:p>
             <a:pPr lvl="1"/>
@@ -10077,7 +10027,7 @@
                 <a:latin typeface="Consolas"/>
                 <a:cs typeface="Consolas"/>
               </a:rPr>
-              <a:t xml:space="preserve">  unit/utils.test.js         # Jest unit tests</a:t>
+              <a:t>  unit/utils.test.js         # Jest unit tests</a:t>
             </a:r>
           </a:p>
           <a:p>
@@ -10086,7 +10036,7 @@
                 <a:latin typeface="Consolas"/>
                 <a:cs typeface="Consolas"/>
               </a:rPr>
-              <a:t xml:space="preserve">  integration/api.test.js    # Supertest API tests</a:t>
+              <a:t>  integration/api.test.js    # Supertest API tests</a:t>
             </a:r>
           </a:p>
           <a:p>
@@ -10095,7 +10045,7 @@
                 <a:latin typeface="Consolas"/>
                 <a:cs typeface="Consolas"/>
               </a:rPr>
-              <a:t xml:space="preserve">  e2e/auth.spec.js           # Playwright browser tests</a:t>
+              <a:t>  e2e/auth.spec.js           # Playwright browser tests</a:t>
             </a:r>
           </a:p>
         </p:txBody>
@@ -10170,7 +10120,7 @@
             </a:r>
             <a:r>
               <a:rPr sz="1600"/>
-              <a:t xml:space="preserve">              Unit + Integration (Jest)</a:t>
+              <a:t>              Unit + Integration (Jest)</a:t>
             </a:r>
           </a:p>
           <a:p>
@@ -10183,7 +10133,7 @@
             </a:r>
             <a:r>
               <a:rPr sz="1600"/>
-              <a:t xml:space="preserve">   Unit tests only</a:t>
+              <a:t>   Unit tests only</a:t>
             </a:r>
           </a:p>
           <a:p>
@@ -10196,7 +10146,7 @@
             </a:r>
             <a:r>
               <a:rPr sz="1600"/>
-              <a:t xml:space="preserve">  API tests only</a:t>
+              <a:t>  API tests only</a:t>
             </a:r>
           </a:p>
           <a:p>
@@ -10209,7 +10159,7 @@
             </a:r>
             <a:r>
               <a:rPr sz="1600"/>
-              <a:t xml:space="preserve">    Browser tests (Playwright)</a:t>
+              <a:t>    Browser tests (Playwright)</a:t>
             </a:r>
           </a:p>
           <a:p>
@@ -10222,7 +10172,7 @@
             </a:r>
             <a:r>
               <a:rPr sz="1600"/>
-              <a:t xml:space="preserve">    Everything</a:t>
+              <a:t>    Everything</a:t>
             </a:r>
           </a:p>
         </p:txBody>
@@ -10268,7 +10218,7 @@
           <a:lstStyle/>
           <a:p>
             <a:r>
-              <a:t>Key Takeaways</a:t>
+              <a:t>Try It - GitHub Codespaces</a:t>
             </a:r>
           </a:p>
         </p:txBody>
@@ -10290,49 +10240,70 @@
           <a:p>
             <a:r>
               <a:rPr b="1"/>
-              <a:t>Use all 3 testing layers</a:t>
+              <a:t>Open the demo repo in Codespaces:</a:t>
             </a:r>
           </a:p>
           <a:p>
             <a:pPr lvl="1"/>
             <a:r>
-              <a:t>Unit tests catch logic bugs fast; integration tests verify APIs; E2E tests catch real user-facing bugs</a:t>
-            </a:r>
+              <a:t>Go to the repo on GitHub</a:t>
+            </a:r>
+          </a:p>
+          <a:p>
+            <a:pPr lvl="1"/>
+            <a:r>
+              <a:t>Click the green Code button, then Codespaces tab</a:t>
+            </a:r>
+          </a:p>
+          <a:p>
+            <a:pPr lvl="1"/>
+            <a:r>
+              <a:t>Click “Create codespace on main”</a:t>
+            </a:r>
+          </a:p>
+          <a:p>
+            <a:endParaRPr/>
           </a:p>
           <a:p>
             <a:r>
               <a:rPr b="1"/>
-              <a:t>Balance speed vs realism</a:t>
+              <a:t>Everything is pre-configured:</a:t>
             </a:r>
           </a:p>
           <a:p>
             <a:pPr lvl="1"/>
             <a:r>
-              <a:t>More unit tests (fast), fewer E2E tests (slow but realistic)</a:t>
-            </a:r>
+              <a:t>Node.js 20 + npm dependencies auto-installed</a:t>
+            </a:r>
+          </a:p>
+          <a:p>
+            <a:pPr lvl="1"/>
+            <a:r>
+              <a:t>Playwright browsers auto-installed</a:t>
+            </a:r>
+          </a:p>
+          <a:p>
+            <a:pPr lvl="1"/>
+            <a:r>
+              <a:t>VS Code extensions for Jest and Playwright</a:t>
+            </a:r>
+          </a:p>
+          <a:p>
+            <a:endParaRPr/>
           </a:p>
           <a:p>
             <a:r>
               <a:rPr b="1"/>
-              <a:t>Automate testing in your workflow</a:t>
-            </a:r>
-          </a:p>
-          <a:p>
-            <a:pPr lvl="1"/>
-            <a:r>
-              <a:t>CI/CD runs tests on every push - catch bugs before production</a:t>
-            </a:r>
-          </a:p>
-          <a:p>
-            <a:r>
-              <a:rPr b="1"/>
-              <a:t>Tests document expected behavior</a:t>
-            </a:r>
-          </a:p>
-          <a:p>
-            <a:pPr lvl="1"/>
-            <a:r>
-              <a:t>If the tests pass, the API contract is met</a:t>
+              <a:t>Run all tests immediately:</a:t>
+            </a:r>
+          </a:p>
+          <a:p>
+            <a:r>
+              <a:rPr sz="1600" b="1">
+                <a:latin typeface="Consolas"/>
+                <a:cs typeface="Consolas"/>
+              </a:rPr>
+              <a:t>npm run test:all</a:t>
             </a:r>
           </a:p>
         </p:txBody>
@@ -10434,7 +10405,7 @@
             </a:r>
             <a:r>
               <a:rPr lang="en-US" dirty="0"/>
-              <a:t xml:space="preserve"> (Unit &amp; Integration)</a:t>
+              <a:t> (Unit &amp; Integration)</a:t>
             </a:r>
           </a:p>
           <a:p>
@@ -10444,7 +10415,7 @@
             </a:r>
             <a:r>
               <a:rPr lang="en-US" dirty="0"/>
-              <a:t xml:space="preserve"> (Architecture &amp; CI/CD Pipelines)</a:t>
+              <a:t> (Architecture &amp; CI/CD Pipelines)</a:t>
             </a:r>
           </a:p>
           <a:p>
@@ -10454,7 +10425,7 @@
             </a:r>
             <a:r>
               <a:rPr lang="en-US" dirty="0"/>
-              <a:t xml:space="preserve"> (</a:t>
+              <a:t> (</a:t>
             </a:r>
             <a:r>
               <a:rPr lang="en-US" dirty="0" err="1"/>
@@ -10462,7 +10433,7 @@
             </a:r>
             <a:r>
               <a:rPr lang="en-US" dirty="0"/>
-              <a:t xml:space="preserve"> &amp; Tooling)</a:t>
+              <a:t> &amp; Tooling)</a:t>
             </a:r>
             <a:br>
               <a:rPr lang="en-US" dirty="0"/>
@@ -10482,7 +10453,7 @@
           <a:p>
             <a:r>
               <a:rPr lang="en-US" dirty="0"/>
-              <a:t xml:space="preserve">Deepen our understanding of </a:t>
+              <a:t>Deepen our understanding of </a:t>
             </a:r>
             <a:r>
               <a:rPr lang="en-US" b="1" dirty="0"/>
@@ -10493,7 +10464,7 @@
           <a:p>
             <a:r>
               <a:rPr lang="en-US" dirty="0"/>
-              <a:t xml:space="preserve">Compare and evaluate </a:t>
+              <a:t>Compare and evaluate </a:t>
             </a:r>
             <a:r>
               <a:rPr lang="en-US" b="1" dirty="0"/>
@@ -10501,7 +10472,7 @@
             </a:r>
             <a:r>
               <a:rPr lang="en-US" dirty="0"/>
-              <a:t xml:space="preserve"> (e.g., Flask)</a:t>
+              <a:t> (e.g., Flask)</a:t>
             </a:r>
           </a:p>
           <a:p>
@@ -10600,7 +10571,7 @@
           <a:lstStyle/>
           <a:p>
             <a:r>
-              <a:t>Try It - GitHub Codespaces</a:t>
+              <a:t>What Test Output Looks Like</a:t>
             </a:r>
           </a:p>
         </p:txBody>
@@ -10622,74 +10593,109 @@
           <a:p>
             <a:r>
               <a:rPr b="1"/>
-              <a:t>Open the demo repo in Codespaces:</a:t>
-            </a:r>
-          </a:p>
-          <a:p>
-            <a:pPr lvl="1"/>
-            <a:r>
-              <a:t>Go to the repo on GitHub</a:t>
-            </a:r>
-          </a:p>
-          <a:p>
-            <a:pPr lvl="1"/>
-            <a:r>
-              <a:t>Click the green Code button, then Codespaces tab</a:t>
-            </a:r>
-          </a:p>
-          <a:p>
-            <a:pPr lvl="1"/>
-            <a:r>
-              <a:t>Click “Create codespace on main”</a:t>
-            </a:r>
-          </a:p>
-          <a:p>
-            <a:r>
-              <a:t/>
-            </a:r>
-          </a:p>
-          <a:p>
-            <a:r>
-              <a:rPr b="1"/>
-              <a:t>Everything is pre-configured:</a:t>
-            </a:r>
-          </a:p>
-          <a:p>
-            <a:pPr lvl="1"/>
-            <a:r>
-              <a:t>Node.js 20 + npm dependencies auto-installed</a:t>
-            </a:r>
-          </a:p>
-          <a:p>
-            <a:pPr lvl="1"/>
-            <a:r>
-              <a:t>Playwright browsers auto-installed</a:t>
-            </a:r>
-          </a:p>
-          <a:p>
-            <a:pPr lvl="1"/>
-            <a:r>
-              <a:t>VS Code extensions for Jest and Playwright</a:t>
-            </a:r>
-          </a:p>
-          <a:p>
-            <a:r>
-              <a:t/>
-            </a:r>
-          </a:p>
-          <a:p>
-            <a:r>
-              <a:rPr b="1"/>
-              <a:t>Run all tests immediately:</a:t>
-            </a:r>
-          </a:p>
-          <a:p>
-            <a:r>
-              <a:rPr sz="1600" b="1">
+              <a:t>Jest (Unit + Integration):</a:t>
+            </a:r>
+          </a:p>
+          <a:p>
+            <a:r>
+              <a:rPr sz="1200">
                 <a:latin typeface="Consolas"/>
                 <a:cs typeface="Consolas"/>
               </a:rPr>
-              <a:t>npm run test:all</a:t>
+              <a:t>PASS tests/unit/utils.test.js</a:t>
+            </a:r>
+          </a:p>
+          <a:p>
+            <a:r>
+              <a:rPr sz="1200">
+                <a:latin typeface="Consolas"/>
+                <a:cs typeface="Consolas"/>
+              </a:rPr>
+              <a:t>  validateCredentials</a:t>
+            </a:r>
+          </a:p>
+          <a:p>
+            <a:r>
+              <a:rPr sz="1200">
+                <a:latin typeface="Consolas"/>
+                <a:cs typeface="Consolas"/>
+              </a:rPr>
+              <a:t>    ✓ accepts valid username and password (2 ms)</a:t>
+            </a:r>
+          </a:p>
+          <a:p>
+            <a:r>
+              <a:rPr sz="1200">
+                <a:latin typeface="Consolas"/>
+                <a:cs typeface="Consolas"/>
+              </a:rPr>
+              <a:t>    ✓ rejects missing username (1 ms)</a:t>
+            </a:r>
+          </a:p>
+          <a:p>
+            <a:r>
+              <a:rPr sz="1200">
+                <a:latin typeface="Consolas"/>
+                <a:cs typeface="Consolas"/>
+              </a:rPr>
+              <a:t>    ✓ rejects short password (&lt; 6 characters)</a:t>
+            </a:r>
+          </a:p>
+          <a:p>
+            <a:r>
+              <a:rPr sz="1200">
+                <a:latin typeface="Consolas"/>
+                <a:cs typeface="Consolas"/>
+              </a:rPr>
+              <a:t>Tests: 22 passed, 22 total | Time: 0.98s</a:t>
+            </a:r>
+          </a:p>
+          <a:p>
+            <a:endParaRPr sz="1200">
+              <a:latin typeface="Consolas"/>
+              <a:cs typeface="Consolas"/>
+            </a:endParaRPr>
+          </a:p>
+          <a:p>
+            <a:r>
+              <a:rPr b="1"/>
+              <a:t>Playwright (E2E):</a:t>
+            </a:r>
+          </a:p>
+          <a:p>
+            <a:r>
+              <a:rPr sz="1200">
+                <a:latin typeface="Consolas"/>
+                <a:cs typeface="Consolas"/>
+              </a:rPr>
+              <a:t>✓ page displays the title and login status (868ms)</a:t>
+            </a:r>
+          </a:p>
+          <a:p>
+            <a:r>
+              <a:rPr sz="1200">
+                <a:latin typeface="Consolas"/>
+                <a:cs typeface="Consolas"/>
+              </a:rPr>
+              <a:t>✓ can register, login, and access the secret (1.3s)</a:t>
+            </a:r>
+          </a:p>
+          <a:p>
+            <a:r>
+              <a:rPr sz="1200">
+                <a:latin typeface="Consolas"/>
+                <a:cs typeface="Consolas"/>
+              </a:rPr>
+              <a:t>✓ logout clears the session (1.1s)</a:t>
+            </a:r>
+          </a:p>
+          <a:p>
+            <a:r>
+              <a:rPr sz="1200">
+                <a:latin typeface="Consolas"/>
+                <a:cs typeface="Consolas"/>
+              </a:rPr>
+              <a:t>5 passed (5.8s)</a:t>
             </a:r>
           </a:p>
         </p:txBody>
@@ -10735,7 +10741,7 @@
           <a:lstStyle/>
           <a:p>
             <a:r>
-              <a:t>What Test Output Looks Like</a:t>
+              <a:t>Exercise: Write Your Own Tests (ungraded)</a:t>
             </a:r>
           </a:p>
         </p:txBody>
@@ -10756,109 +10762,74 @@
           <a:lstStyle/>
           <a:p>
             <a:r>
+              <a:t>Add one new test to each layer. See the README for hints and solutions.</a:t>
+            </a:r>
+          </a:p>
+          <a:p>
+            <a:endParaRPr/>
+          </a:p>
+          <a:p>
+            <a:r>
               <a:rPr b="1"/>
-              <a:t>Jest (Unit + Integration):</a:t>
-            </a:r>
-          </a:p>
-          <a:p>
-            <a:r>
-              <a:rPr sz="1200">
+              <a:t>1. Unit Test</a:t>
+            </a:r>
+          </a:p>
+          <a:p>
+            <a:pPr lvl="1"/>
+            <a:r>
+              <a:t>Test validateCredentials with a whitespace-only username</a:t>
+            </a:r>
+          </a:p>
+          <a:p>
+            <a:pPr lvl="1"/>
+            <a:r>
+              <a:t>Does the current code handle this? If not, fix the bug!</a:t>
+            </a:r>
+          </a:p>
+          <a:p>
+            <a:endParaRPr/>
+          </a:p>
+          <a:p>
+            <a:r>
+              <a:rPr b="1"/>
+              <a:t>2. Integration Test</a:t>
+            </a:r>
+          </a:p>
+          <a:p>
+            <a:pPr lvl="1"/>
+            <a:r>
+              <a:t>Test that /api/refresh returns a new access token after login</a:t>
+            </a:r>
+          </a:p>
+          <a:p>
+            <a:endParaRPr/>
+          </a:p>
+          <a:p>
+            <a:r>
+              <a:rPr b="1"/>
+              <a:t>3. E2E Test</a:t>
+            </a:r>
+          </a:p>
+          <a:p>
+            <a:pPr lvl="1"/>
+            <a:r>
+              <a:t>Test that registering a duplicate username shows an error in the UI</a:t>
+            </a:r>
+          </a:p>
+          <a:p>
+            <a:endParaRPr/>
+          </a:p>
+          <a:p>
+            <a:r>
+              <a:rPr b="1"/>
+              <a:t>Verify:</a:t>
+            </a:r>
+            <a:r>
+              <a:rPr sz="1600">
                 <a:latin typeface="Consolas"/>
                 <a:cs typeface="Consolas"/>
               </a:rPr>
-              <a:t>PASS tests/unit/utils.test.js</a:t>
-            </a:r>
-          </a:p>
-          <a:p>
-            <a:r>
-              <a:rPr sz="1200">
-                <a:latin typeface="Consolas"/>
-                <a:cs typeface="Consolas"/>
-              </a:rPr>
-              <a:t xml:space="preserve">  validateCredentials</a:t>
-            </a:r>
-          </a:p>
-          <a:p>
-            <a:r>
-              <a:rPr sz="1200">
-                <a:latin typeface="Consolas"/>
-                <a:cs typeface="Consolas"/>
-              </a:rPr>
-              <a:t xml:space="preserve">    ✓ accepts valid username and password (2 ms)</a:t>
-            </a:r>
-          </a:p>
-          <a:p>
-            <a:r>
-              <a:rPr sz="1200">
-                <a:latin typeface="Consolas"/>
-                <a:cs typeface="Consolas"/>
-              </a:rPr>
-              <a:t xml:space="preserve">    ✓ rejects missing username (1 ms)</a:t>
-            </a:r>
-          </a:p>
-          <a:p>
-            <a:r>
-              <a:rPr sz="1200">
-                <a:latin typeface="Consolas"/>
-                <a:cs typeface="Consolas"/>
-              </a:rPr>
-              <a:t xml:space="preserve">    ✓ rejects short password (&lt; 6 characters)</a:t>
-            </a:r>
-          </a:p>
-          <a:p>
-            <a:r>
-              <a:rPr sz="1200">
-                <a:latin typeface="Consolas"/>
-                <a:cs typeface="Consolas"/>
-              </a:rPr>
-              <a:t>Tests: 22 passed, 22 total | Time: 0.98s</a:t>
-            </a:r>
-          </a:p>
-          <a:p>
-            <a:r>
-              <a:t/>
-            </a:r>
-          </a:p>
-          <a:p>
-            <a:r>
-              <a:rPr b="1"/>
-              <a:t>Playwright (E2E):</a:t>
-            </a:r>
-          </a:p>
-          <a:p>
-            <a:r>
-              <a:rPr sz="1200">
-                <a:latin typeface="Consolas"/>
-                <a:cs typeface="Consolas"/>
-              </a:rPr>
-              <a:t>✓ page displays the title and login status (868ms)</a:t>
-            </a:r>
-          </a:p>
-          <a:p>
-            <a:r>
-              <a:rPr sz="1200">
-                <a:latin typeface="Consolas"/>
-                <a:cs typeface="Consolas"/>
-              </a:rPr>
-              <a:t>✓ can register, login, and access the secret (1.3s)</a:t>
-            </a:r>
-          </a:p>
-          <a:p>
-            <a:r>
-              <a:rPr sz="1200">
-                <a:latin typeface="Consolas"/>
-                <a:cs typeface="Consolas"/>
-              </a:rPr>
-              <a:t>✓ logout clears the session (1.1s)</a:t>
-            </a:r>
-          </a:p>
-          <a:p>
-            <a:r>
-              <a:rPr sz="1200">
-                <a:latin typeface="Consolas"/>
-                <a:cs typeface="Consolas"/>
-              </a:rPr>
-              <a:t>5 passed (5.8s)</a:t>
+              <a:t> npm run test:all</a:t>
             </a:r>
           </a:p>
         </p:txBody>
@@ -10904,7 +10875,7 @@
           <a:lstStyle/>
           <a:p>
             <a:r>
-              <a:t>Exercise: Write Your Own Tests (ungraded)</a:t>
+              <a:t>Key Takeaways</a:t>
             </a:r>
           </a:p>
         </p:txBody>
@@ -10925,82 +10896,50 @@
           <a:lstStyle/>
           <a:p>
             <a:r>
-              <a:t>Add one new test to each layer. See the README for hints and solutions.</a:t>
-            </a:r>
-          </a:p>
-          <a:p>
-            <a:r>
-              <a:t/>
-            </a:r>
-          </a:p>
-          <a:p>
-            <a:r>
               <a:rPr b="1"/>
-              <a:t>1. Unit Test</a:t>
+              <a:t>Use all 3 testing layers</a:t>
             </a:r>
           </a:p>
           <a:p>
             <a:pPr lvl="1"/>
             <a:r>
-              <a:t>Test validateCredentials with a whitespace-only username</a:t>
+              <a:t>Unit tests catch logic bugs fast; integration tests verify APIs; E2E tests catch real user-facing bugs</a:t>
+            </a:r>
+          </a:p>
+          <a:p>
+            <a:r>
+              <a:rPr b="1"/>
+              <a:t>Balance speed vs realism</a:t>
             </a:r>
           </a:p>
           <a:p>
             <a:pPr lvl="1"/>
             <a:r>
-              <a:t>Does the current code handle this? If not, fix the bug!</a:t>
-            </a:r>
-          </a:p>
-          <a:p>
-            <a:r>
-              <a:t/>
+              <a:t>More unit tests (fast), fewer E2E tests (slow but realistic)</a:t>
             </a:r>
           </a:p>
           <a:p>
             <a:r>
               <a:rPr b="1"/>
-              <a:t>2. Integration Test</a:t>
+              <a:t>Automate testing in your workflow</a:t>
             </a:r>
           </a:p>
           <a:p>
             <a:pPr lvl="1"/>
             <a:r>
-              <a:t>Test that /api/refresh returns a new access token after login</a:t>
-            </a:r>
-          </a:p>
-          <a:p>
-            <a:r>
-              <a:t/>
+              <a:t>CI/CD runs tests on every push - catch bugs before production</a:t>
             </a:r>
           </a:p>
           <a:p>
             <a:r>
               <a:rPr b="1"/>
-              <a:t>3. E2E Test</a:t>
+              <a:t>Tests document expected behavior</a:t>
             </a:r>
           </a:p>
           <a:p>
             <a:pPr lvl="1"/>
             <a:r>
-              <a:t>Test that registering a duplicate username shows an error in the UI</a:t>
-            </a:r>
-          </a:p>
-          <a:p>
-            <a:r>
-              <a:t/>
-            </a:r>
-          </a:p>
-          <a:p>
-            <a:r>
-              <a:rPr b="1"/>
-              <a:t>Verify:</a:t>
-            </a:r>
-            <a:r>
-              <a:rPr sz="1600">
-                <a:latin typeface="Consolas"/>
-                <a:cs typeface="Consolas"/>
-              </a:rPr>
-              <a:t xml:space="preserve"> npm run test:all</a:t>
+              <a:t>If the tests pass, the API contract is met</a:t>
             </a:r>
           </a:p>
         </p:txBody>
@@ -11126,7 +11065,7 @@
             </a:r>
             <a:r>
               <a:rPr lang="en-US" dirty="0"/>
-              <a:t xml:space="preserve"> Documentation](https://</a:t>
+              <a:t> Documentation](https://</a:t>
             </a:r>
             <a:r>
               <a:rPr lang="en-US" dirty="0" err="1"/>
@@ -11429,7 +11368,7 @@
             </a:r>
             <a:r>
               <a:rPr lang="en-US" dirty="0"/>
-              <a:t xml:space="preserve">, reliable </a:t>
+              <a:t>, reliable </a:t>
             </a:r>
             <a:r>
               <a:rPr dirty="0"/>
@@ -11655,7 +11594,7 @@
           <a:p>
             <a:r>
               <a:rPr lang="en-US" dirty="0"/>
-              <a:t xml:space="preserve">Testing Functionality and Deployments </a:t>
+              <a:t>Testing Functionality and Deployments </a:t>
             </a:r>
           </a:p>
         </p:txBody>
